--- a/gate_review_precursor.pptx
+++ b/gate_review_precursor.pptx
@@ -20213,8 +20213,8 @@
                 </a:solidFill>
                 <a:latin typeface="맑은 고딕"/>
               </a:rPr>
-              <a:t>리사이즈
-2048 × 1636</a:t>
+              <a:t>리사이즈  (--preprocess_width W)
+기본 W=1024  →  1024 × 818</a:t>
             </a:r>
           </a:p>
         </p:txBody>
@@ -20305,8 +20305,8 @@
                 </a:solidFill>
                 <a:latin typeface="맑은 고딕"/>
               </a:rPr>
-              <a:t>하단 100px 크롭
-(스케일바 제거)</a:t>
+              <a:t>하단 크롭  (스케일바 제거)
+기본 round(W·100/2048)=50 px</a:t>
             </a:r>
           </a:p>
         </p:txBody>
@@ -20397,8 +20397,8 @@
                 </a:solidFill>
                 <a:latin typeface="맑은 고딕"/>
               </a:rPr>
-              <a:t>출력: 2048 × 1536
-(고정 해상도)</a:t>
+              <a:t>출력 (기본)
+1024 × 768</a:t>
             </a:r>
           </a:p>
         </p:txBody>

--- a/gate_review_precursor.pptx
+++ b/gate_review_precursor.pptx
@@ -20784,7 +20784,7 @@
                 </a:solidFill>
                 <a:latin typeface="맑은 고딕"/>
               </a:rPr>
-              <a:t>2차 입자 파이프라인</a:t>
+              <a:t>1차 입자 파이프라인</a:t>
             </a:r>
           </a:p>
           <a:p>
@@ -21526,7 +21526,7 @@
                 </a:solidFill>
                 <a:latin typeface="맑은 고딕"/>
               </a:rPr>
-              <a:t>1차 입자 파이프라인</a:t>
+              <a:t>2차 입자 파이프라인</a:t>
             </a:r>
           </a:p>
           <a:p>
